--- a/decks/geog-tectonics/geog-tectonics_ch3_plate-boundaries.pptx
+++ b/decks/geog-tectonics/geog-tectonics_ch3_plate-boundaries.pptx
@@ -126,30 +126,30 @@
   <p:extLst>
     <p:ext uri="{521415D9-36F7-43E2-AB2F-B90AF26B5E84}">
       <p14:sectionLst xmlns:p14="http://schemas.microsoft.com/office/powerpoint/2010/main">
-        <p14:section name="Opening" id="{a253a64d-4cb8-62fb-cfbf-fa20507d4db9}">
+        <p14:section name="Opening" id="{7198d459-ff38-3d30-ca65-ad26849285ed}">
           <p14:sldIdLst>
             <p14:sldId id="256"/>
           </p14:sldIdLst>
         </p14:section>
-        <p14:section name="Gate" id="{65e36210-eb25-5e28-7bfa-523bce4aeb27}">
+        <p14:section name="Gate" id="{8233a925-a42a-7955-b55f-a5a721c8c08e}">
           <p14:sldIdLst>
             <p14:sldId id="257"/>
             <p14:sldId id="258"/>
           </p14:sldIdLst>
         </p14:section>
-        <p14:section name="Pre-teach" id="{388eb253-66bd-240a-c17e-4f3a2ea48287}">
+        <p14:section name="Pre-teach" id="{10f67251-baaf-cff4-c0f0-b566812e1ed4}">
           <p14:sldIdLst>
             <p14:sldId id="259"/>
             <p14:sldId id="260"/>
           </p14:sldIdLst>
         </p14:section>
-        <p14:section name="Read-along" id="{23fd0658-b93b-9466-0c35-75d54ed8c6be}">
+        <p14:section name="Read-along" id="{7548f680-7065-8b8c-d696-1009c0644727}">
           <p14:sldIdLst>
             <p14:sldId id="261"/>
             <p14:sldId id="262"/>
           </p14:sldIdLst>
         </p14:section>
-        <p14:section name="Teach" id="{a5b4a88f-0e1a-1e96-45de-1c9390da18df}">
+        <p14:section name="Teach" id="{a6bd6dc6-92eb-4765-1f97-9d796ff3509c}">
           <p14:sldIdLst>
             <p14:sldId id="263"/>
             <p14:sldId id="264"/>
@@ -158,7 +158,7 @@
             <p14:sldId id="267"/>
           </p14:sldIdLst>
         </p14:section>
-        <p14:section name="Routes" id="{e0c8e267-5ccf-238a-2419-c36d1f9bf7b3}">
+        <p14:section name="Routes" id="{05ff4562-cd4f-35f6-ad42-b07c10890499}">
           <p14:sldIdLst>
             <p14:sldId id="268"/>
             <p14:sldId id="269"/>
@@ -166,12 +166,12 @@
             <p14:sldId id="271"/>
           </p14:sldIdLst>
         </p14:section>
-        <p14:section name="Close" id="{ee2f711c-63e2-98f7-c654-3ffdec8df8ee}">
+        <p14:section name="Close" id="{564ab865-ff23-e762-95a1-aeaa16d99661}">
           <p14:sldIdLst>
             <p14:sldId id="272"/>
           </p14:sldIdLst>
         </p14:section>
-        <p14:section name="Answers" id="{af2d136f-1590-2bf1-ecb1-1029f7168843}">
+        <p14:section name="Answers" id="{620d94ef-8f0d-6395-269d-c22c10f5a8f4}">
           <p14:sldIdLst>
             <p14:sldId id="273"/>
             <p14:sldId id="274"/>
@@ -1510,7 +1510,7 @@
             <a:r>
               <a:rPr lang="en-US" dirty="0"/>
               <a:t>Answers — task 2: Reading the diagram. Reveal the answer; pupils mark their own work in a different colour, then read the "why" together. Same destination for every lane, so one answer serves the whole class.
-Answer: A   Destructive
+Answer: D   Destructive
 Why: Plates moving together with the oceanic plate forced down and destroyed is the definition of a destructive boundary. Collision has no sinking plate.
 Ask a Support pupil to explain one step, and a Stretch pupil to share their extension.</a:t>
             </a:r>
@@ -1603,7 +1603,7 @@
               <a:t>Do now — retrieval. Silent, no notes, no help: recall comes before any support. Give about four minutes.
 1. At which type of plate boundary do two plates move apart, so that magma rises and forms new crust?  →  A   Constructive
 2. At a ___ boundary two plates slide past each other along a fault, and the plates are not changed.  →  conservative
-3. Which type of plate boundary formed the Himalayas?  →  A   Collision
+3. Which type of plate boundary formed the Himalayas?  →  B   Collision
 Circulate: who gets 3/3 (Stretch route), 2/3 (Core), 0–1 (Support)? Use this to route pupils later in the lesson.</a:t>
             </a:r>
             <a:endParaRPr lang="en-US" dirty="0"/>
@@ -1786,7 +1786,7 @@
               <a:t>Answers — pupils mark their own in a different colour, then hands up for 3/3, 2/3, 1/3.
 1. A   Constructive. Constructive boundaries build new crust as the plates move apart and magma rises to fill the gap.
 2. conservative. Conservative boundaries conserve the plates: they slide past each other sideways with no crust made or destroyed.
-3. A   Collision. Two continental plates, the Indo-Australian and the Eurasian, met head on and pushed the land up into the Himalayas.
+3. B   Collision. Two continental plates, the Indo-Australian and the Eurasian, met head on and pushed the land up into the Himalayas.
 Say the route each score points to: 3/3 Stretch, 2/3 Core, 0–1 Support. Pupils may choose to move up.</a:t>
             </a:r>
             <a:endParaRPr lang="en-US" dirty="0"/>
@@ -8540,7 +8540,7 @@
                 <a:ea typeface="Calibri" pitchFamily="34" charset="-122"/>
                 <a:cs typeface="Calibri" pitchFamily="34" charset="-120"/>
               </a:rPr>
-              <a:t>Destructive      </a:t>
+              <a:t>Conservative      </a:t>
             </a:r>
             <a:pPr algn="ctr" indent="0" marL="0">
               <a:buNone/>
@@ -8596,7 +8596,7 @@
                 <a:ea typeface="Calibri" pitchFamily="34" charset="-122"/>
                 <a:cs typeface="Calibri" pitchFamily="34" charset="-120"/>
               </a:rPr>
-              <a:t>Conservative      </a:t>
+              <a:t>Collision      </a:t>
             </a:r>
             <a:pPr algn="ctr" indent="0" marL="0">
               <a:buNone/>
@@ -8624,7 +8624,7 @@
                 <a:ea typeface="Calibri" pitchFamily="34" charset="-122"/>
                 <a:cs typeface="Calibri" pitchFamily="34" charset="-120"/>
               </a:rPr>
-              <a:t>Collision</a:t>
+              <a:t>Destructive</a:t>
             </a:r>
             <a:endParaRPr lang="en-US" sz="2600" dirty="0"/>
           </a:p>
@@ -10025,7 +10025,7 @@
                 <a:ea typeface="Calibri" pitchFamily="34" charset="-122"/>
                 <a:cs typeface="Calibri" pitchFamily="34" charset="-120"/>
               </a:rPr>
-              <a:t>Destructive</a:t>
+              <a:t>Conservative</a:t>
             </a:r>
             <a:endParaRPr lang="en-US" sz="2400" dirty="0"/>
           </a:p>
@@ -10062,7 +10062,7 @@
                 <a:ea typeface="Calibri" pitchFamily="34" charset="-122"/>
                 <a:cs typeface="Calibri" pitchFamily="34" charset="-120"/>
               </a:rPr>
-              <a:t>Conservative</a:t>
+              <a:t>Destructive</a:t>
             </a:r>
             <a:endParaRPr lang="en-US" sz="2400" dirty="0"/>
           </a:p>
@@ -11111,7 +11111,7 @@
                 <a:ea typeface="Cambria" pitchFamily="34" charset="-122"/>
                 <a:cs typeface="Cambria" pitchFamily="34" charset="-120"/>
               </a:rPr>
-              <a:t>A   Destructive</a:t>
+              <a:t>D   Destructive</a:t>
             </a:r>
             <a:endParaRPr lang="en-US" sz="1800" dirty="0"/>
           </a:p>
@@ -11682,7 +11682,7 @@
                 <a:ea typeface="Calibri" pitchFamily="34" charset="-122"/>
                 <a:cs typeface="Calibri" pitchFamily="34" charset="-120"/>
               </a:rPr>
-              <a:t>Destructive</a:t>
+              <a:t>Conservative</a:t>
             </a:r>
             <a:endParaRPr lang="en-US" sz="2200" dirty="0"/>
           </a:p>
@@ -11719,7 +11719,7 @@
                 <a:ea typeface="Calibri" pitchFamily="34" charset="-122"/>
                 <a:cs typeface="Calibri" pitchFamily="34" charset="-120"/>
               </a:rPr>
-              <a:t>Conservative</a:t>
+              <a:t>Destructive</a:t>
             </a:r>
             <a:endParaRPr lang="en-US" sz="2200" dirty="0"/>
           </a:p>
@@ -12158,7 +12158,7 @@
                 <a:ea typeface="Calibri" pitchFamily="34" charset="-122"/>
                 <a:cs typeface="Calibri" pitchFamily="34" charset="-120"/>
               </a:rPr>
-              <a:t>Collision</a:t>
+              <a:t>Constructive</a:t>
             </a:r>
             <a:endParaRPr lang="en-US" sz="2400" dirty="0"/>
           </a:p>
@@ -12195,7 +12195,7 @@
                 <a:ea typeface="Calibri" pitchFamily="34" charset="-122"/>
                 <a:cs typeface="Calibri" pitchFamily="34" charset="-120"/>
               </a:rPr>
-              <a:t>Constructive</a:t>
+              <a:t>Collision</a:t>
             </a:r>
             <a:endParaRPr lang="en-US" sz="2400" dirty="0"/>
           </a:p>
@@ -12232,7 +12232,7 @@
                 <a:ea typeface="Calibri" pitchFamily="34" charset="-122"/>
                 <a:cs typeface="Calibri" pitchFamily="34" charset="-120"/>
               </a:rPr>
-              <a:t>Conservative</a:t>
+              <a:t>Destructive</a:t>
             </a:r>
             <a:endParaRPr lang="en-US" sz="2400" dirty="0"/>
           </a:p>
@@ -12269,7 +12269,7 @@
                 <a:ea typeface="Calibri" pitchFamily="34" charset="-122"/>
                 <a:cs typeface="Calibri" pitchFamily="34" charset="-120"/>
               </a:rPr>
-              <a:t>Destructive</a:t>
+              <a:t>Conservative</a:t>
             </a:r>
             <a:endParaRPr lang="en-US" sz="2400" dirty="0"/>
           </a:p>
@@ -13629,7 +13629,7 @@
                 <a:ea typeface="Calibri" pitchFamily="34" charset="-122"/>
                 <a:cs typeface="Calibri" pitchFamily="34" charset="-120"/>
               </a:rPr>
-              <a:t>A   Collision</a:t>
+              <a:t>B   Collision</a:t>
             </a:r>
             <a:endParaRPr lang="en-US" sz="2200" dirty="0"/>
           </a:p>

--- a/decks/geog-tectonics/geog-tectonics_ch3_plate-boundaries.pptx
+++ b/decks/geog-tectonics/geog-tectonics_ch3_plate-boundaries.pptx
@@ -126,30 +126,30 @@
   <p:extLst>
     <p:ext uri="{521415D9-36F7-43E2-AB2F-B90AF26B5E84}">
       <p14:sectionLst xmlns:p14="http://schemas.microsoft.com/office/powerpoint/2010/main">
-        <p14:section name="Opening" id="{7198d459-ff38-3d30-ca65-ad26849285ed}">
+        <p14:section name="Opening" id="{e457dab2-3f62-41e2-03e7-84da6fa0e80c}">
           <p14:sldIdLst>
             <p14:sldId id="256"/>
           </p14:sldIdLst>
         </p14:section>
-        <p14:section name="Gate" id="{8233a925-a42a-7955-b55f-a5a721c8c08e}">
+        <p14:section name="Gate" id="{feb32b46-8bfb-2fa1-b1d6-ce26600e8d4b}">
           <p14:sldIdLst>
             <p14:sldId id="257"/>
             <p14:sldId id="258"/>
           </p14:sldIdLst>
         </p14:section>
-        <p14:section name="Pre-teach" id="{10f67251-baaf-cff4-c0f0-b566812e1ed4}">
+        <p14:section name="Pre-teach" id="{19d6fdee-d910-d007-adb8-760428684ab4}">
           <p14:sldIdLst>
             <p14:sldId id="259"/>
             <p14:sldId id="260"/>
           </p14:sldIdLst>
         </p14:section>
-        <p14:section name="Read-along" id="{7548f680-7065-8b8c-d696-1009c0644727}">
+        <p14:section name="Read-along" id="{785ad1f8-6e12-bbe3-fc8a-eb78d7b59373}">
           <p14:sldIdLst>
             <p14:sldId id="261"/>
             <p14:sldId id="262"/>
           </p14:sldIdLst>
         </p14:section>
-        <p14:section name="Teach" id="{a6bd6dc6-92eb-4765-1f97-9d796ff3509c}">
+        <p14:section name="Teach" id="{064e913f-032d-ec6a-253b-77e5faa0a8e3}">
           <p14:sldIdLst>
             <p14:sldId id="263"/>
             <p14:sldId id="264"/>
@@ -158,7 +158,7 @@
             <p14:sldId id="267"/>
           </p14:sldIdLst>
         </p14:section>
-        <p14:section name="Routes" id="{05ff4562-cd4f-35f6-ad42-b07c10890499}">
+        <p14:section name="Routes" id="{06ea6099-6f7f-2e07-9b45-8e62ec2fcb73}">
           <p14:sldIdLst>
             <p14:sldId id="268"/>
             <p14:sldId id="269"/>
@@ -166,12 +166,12 @@
             <p14:sldId id="271"/>
           </p14:sldIdLst>
         </p14:section>
-        <p14:section name="Close" id="{564ab865-ff23-e762-95a1-aeaa16d99661}">
+        <p14:section name="Close" id="{922d32e3-adb3-2214-24a3-67394acdd0c0}">
           <p14:sldIdLst>
             <p14:sldId id="272"/>
           </p14:sldIdLst>
         </p14:section>
-        <p14:section name="Answers" id="{620d94ef-8f0d-6395-269d-c22c10f5a8f4}">
+        <p14:section name="Answers" id="{7a16d914-deb8-1ecc-e1a3-3fc3052c6160}">
           <p14:sldIdLst>
             <p14:sldId id="273"/>
             <p14:sldId id="274"/>
